--- a/CodeAtlas-Presentation.pptx
+++ b/CodeAtlas-Presentation.pptx
@@ -6641,7 +6641,7 @@
         <p:spPr>
           <a:xfrm>
             <a:off x="822960" y="1691640"/>
-            <a:ext cx="10058400" cy="4288353"/>
+            <a:ext cx="10058400" cy="4416594"/>
           </a:xfrm>
           <a:prstGeom prst="rect">
             <a:avLst/>
@@ -6666,20 +6666,8 @@
               </a:defRPr>
             </a:pPr>
             <a:r>
-              <a:rPr sz="3200" dirty="0"/>
-              <a:t>• </a:t>
-            </a:r>
-            <a:r>
               <a:rPr lang="en-US" sz="3200" dirty="0"/>
-              <a:t>GitHub / GitLab sync — Connect a repo link so </a:t>
-            </a:r>
-            <a:r>
-              <a:rPr lang="en-US" sz="3200" dirty="0" err="1"/>
-              <a:t>CodeAtlas</a:t>
-            </a:r>
-            <a:r>
-              <a:rPr lang="en-US" sz="3200" dirty="0"/>
-              <a:t> picks up change requests automatically, without re-uploading the zip</a:t>
+              <a:t>• GitHub / GitLab sync — Auto-update from repo; no zip re-upload</a:t>
             </a:r>
           </a:p>
           <a:p>
@@ -6696,7 +6684,7 @@
             </a:pPr>
             <a:r>
               <a:rPr lang="en-US" sz="3200" dirty="0"/>
-              <a:t>• Project chatbot — Ask questions about that specific scanned project in chat</a:t>
+              <a:t>• Project chatbot — Ask questions about that scanned project</a:t>
             </a:r>
           </a:p>
           <a:p>
@@ -6713,7 +6701,24 @@
             </a:pPr>
             <a:r>
               <a:rPr lang="en-US" sz="3200" dirty="0"/>
-              <a:t>• Saved project history — Store scan results in a database so past projects stay available and can be opened again in one click</a:t>
+              <a:t>• Saved project history — Keep scans in DB; reopen in one click</a:t>
+            </a:r>
+          </a:p>
+          <a:p>
+            <a:pPr>
+              <a:spcAft>
+                <a:spcPts val="1000"/>
+              </a:spcAft>
+              <a:defRPr sz="1800">
+                <a:solidFill>
+                  <a:srgbClr val="C5DDD2"/>
+                </a:solidFill>
+                <a:latin typeface="Calibri"/>
+              </a:defRPr>
+            </a:pPr>
+            <a:r>
+              <a:rPr lang="en-US" sz="3200" dirty="0"/>
+              <a:t>• Live project preview — Run the app and show module screens with visuals</a:t>
             </a:r>
           </a:p>
         </p:txBody>
